--- a/docs/templates/BNI_テンプレート_事前MTG.pptx
+++ b/docs/templates/BNI_テンプレート_事前MTG.pptx
@@ -554,7 +554,7 @@
           <a:p>
             <a:pPr indent="0" marL="0">
               <a:lnSpc>
-                <a:spcPct val="115000"/>
+                <a:spcPct val="100000"/>
               </a:lnSpc>
               <a:buNone/>
             </a:pPr>
@@ -631,7 +631,7 @@
           <a:p>
             <a:pPr indent="0" marL="0">
               <a:lnSpc>
-                <a:spcPct val="115000"/>
+                <a:spcPct val="100000"/>
               </a:lnSpc>
               <a:buNone/>
             </a:pPr>
@@ -708,7 +708,7 @@
           <a:p>
             <a:pPr indent="0" marL="0">
               <a:lnSpc>
-                <a:spcPct val="115000"/>
+                <a:spcPct val="100000"/>
               </a:lnSpc>
               <a:buNone/>
             </a:pPr>
@@ -894,7 +894,7 @@
           <a:p>
             <a:pPr indent="0" marL="0">
               <a:lnSpc>
-                <a:spcPct val="130000"/>
+                <a:spcPct val="110000"/>
               </a:lnSpc>
               <a:buNone/>
             </a:pPr>
@@ -1078,7 +1078,7 @@
           <a:p>
             <a:pPr indent="0" marL="0">
               <a:lnSpc>
-                <a:spcPct val="130000"/>
+                <a:spcPct val="110000"/>
               </a:lnSpc>
               <a:buNone/>
             </a:pPr>
@@ -1264,7 +1264,7 @@
           <a:p>
             <a:pPr indent="0" marL="0">
               <a:lnSpc>
-                <a:spcPct val="130000"/>
+                <a:spcPct val="110000"/>
               </a:lnSpc>
               <a:buNone/>
             </a:pPr>
@@ -1331,10 +1331,10 @@
     </a:clrScheme>
     <a:fontScheme name="Office">
       <a:majorFont>
-        <a:latin typeface="Calibri Light" panose="020F0302020204030204"/>
-        <a:ea typeface=""/>
+        <a:latin typeface="メイリオ"/>
+        <a:ea typeface="メイリオ"/>
         <a:cs typeface=""/>
-        <a:font script="Jpan" typeface="游ゴシック Light"/>
+        <a:font script="Jpan" typeface="メイリオ"/>
         <a:font script="Hang" typeface="맑은 고딕"/>
         <a:font script="Hans" typeface="等线 Light"/>
         <a:font script="Hant" typeface="新細明體"/>
@@ -1383,10 +1383,10 @@
         <a:font script="Tfng" typeface="Ebrima"/>
       </a:majorFont>
       <a:minorFont>
-        <a:latin typeface="Calibri" panose="020F0502020204030204"/>
-        <a:ea typeface=""/>
+        <a:latin typeface="メイリオ"/>
+        <a:ea typeface="メイリオ"/>
         <a:cs typeface=""/>
-        <a:font script="Jpan" typeface="游ゴシック"/>
+        <a:font script="Jpan" typeface="メイリオ"/>
         <a:font script="Hang" typeface="맑은 고딕"/>
         <a:font script="Hans" typeface="等线"/>
         <a:font script="Hant" typeface="新細明體"/>
